--- a/yamakage-watch-app/dev-tools/icon_generater/icon.pptx
+++ b/yamakage-watch-app/dev-tools/icon_generater/icon.pptx
@@ -259,7 +259,7 @@
           <a:p>
             <a:fld id="{84F5E02D-0C8B-421E-ABD8-EBBDC56DCCEC}" type="datetimeFigureOut">
               <a:rPr kumimoji="1" lang="ja-JP" altLang="en-US" smtClean="0"/>
-              <a:t>2026/8/19</a:t>
+              <a:t>2026/8/22</a:t>
             </a:fld>
             <a:endParaRPr kumimoji="1" lang="ja-JP" altLang="en-US"/>
           </a:p>
@@ -489,7 +489,7 @@
           <a:p>
             <a:fld id="{84F5E02D-0C8B-421E-ABD8-EBBDC56DCCEC}" type="datetimeFigureOut">
               <a:rPr kumimoji="1" lang="ja-JP" altLang="en-US" smtClean="0"/>
-              <a:t>2026/8/19</a:t>
+              <a:t>2026/8/22</a:t>
             </a:fld>
             <a:endParaRPr kumimoji="1" lang="ja-JP" altLang="en-US"/>
           </a:p>
@@ -729,7 +729,7 @@
           <a:p>
             <a:fld id="{84F5E02D-0C8B-421E-ABD8-EBBDC56DCCEC}" type="datetimeFigureOut">
               <a:rPr kumimoji="1" lang="ja-JP" altLang="en-US" smtClean="0"/>
-              <a:t>2026/8/19</a:t>
+              <a:t>2026/8/22</a:t>
             </a:fld>
             <a:endParaRPr kumimoji="1" lang="ja-JP" altLang="en-US"/>
           </a:p>
@@ -959,7 +959,7 @@
           <a:p>
             <a:fld id="{84F5E02D-0C8B-421E-ABD8-EBBDC56DCCEC}" type="datetimeFigureOut">
               <a:rPr kumimoji="1" lang="ja-JP" altLang="en-US" smtClean="0"/>
-              <a:t>2026/8/19</a:t>
+              <a:t>2026/8/22</a:t>
             </a:fld>
             <a:endParaRPr kumimoji="1" lang="ja-JP" altLang="en-US"/>
           </a:p>
@@ -1234,7 +1234,7 @@
           <a:p>
             <a:fld id="{84F5E02D-0C8B-421E-ABD8-EBBDC56DCCEC}" type="datetimeFigureOut">
               <a:rPr kumimoji="1" lang="ja-JP" altLang="en-US" smtClean="0"/>
-              <a:t>2026/8/19</a:t>
+              <a:t>2026/8/22</a:t>
             </a:fld>
             <a:endParaRPr kumimoji="1" lang="ja-JP" altLang="en-US"/>
           </a:p>
@@ -1563,7 +1563,7 @@
           <a:p>
             <a:fld id="{84F5E02D-0C8B-421E-ABD8-EBBDC56DCCEC}" type="datetimeFigureOut">
               <a:rPr kumimoji="1" lang="ja-JP" altLang="en-US" smtClean="0"/>
-              <a:t>2026/8/19</a:t>
+              <a:t>2026/8/22</a:t>
             </a:fld>
             <a:endParaRPr kumimoji="1" lang="ja-JP" altLang="en-US"/>
           </a:p>
@@ -2039,7 +2039,7 @@
           <a:p>
             <a:fld id="{84F5E02D-0C8B-421E-ABD8-EBBDC56DCCEC}" type="datetimeFigureOut">
               <a:rPr kumimoji="1" lang="ja-JP" altLang="en-US" smtClean="0"/>
-              <a:t>2026/8/19</a:t>
+              <a:t>2026/8/22</a:t>
             </a:fld>
             <a:endParaRPr kumimoji="1" lang="ja-JP" altLang="en-US"/>
           </a:p>
@@ -2180,7 +2180,7 @@
           <a:p>
             <a:fld id="{84F5E02D-0C8B-421E-ABD8-EBBDC56DCCEC}" type="datetimeFigureOut">
               <a:rPr kumimoji="1" lang="ja-JP" altLang="en-US" smtClean="0"/>
-              <a:t>2026/8/19</a:t>
+              <a:t>2026/8/22</a:t>
             </a:fld>
             <a:endParaRPr kumimoji="1" lang="ja-JP" altLang="en-US"/>
           </a:p>
@@ -2293,7 +2293,7 @@
           <a:p>
             <a:fld id="{84F5E02D-0C8B-421E-ABD8-EBBDC56DCCEC}" type="datetimeFigureOut">
               <a:rPr kumimoji="1" lang="ja-JP" altLang="en-US" smtClean="0"/>
-              <a:t>2026/8/19</a:t>
+              <a:t>2026/8/22</a:t>
             </a:fld>
             <a:endParaRPr kumimoji="1" lang="ja-JP" altLang="en-US"/>
           </a:p>
@@ -2636,7 +2636,7 @@
           <a:p>
             <a:fld id="{84F5E02D-0C8B-421E-ABD8-EBBDC56DCCEC}" type="datetimeFigureOut">
               <a:rPr kumimoji="1" lang="ja-JP" altLang="en-US" smtClean="0"/>
-              <a:t>2026/8/19</a:t>
+              <a:t>2026/8/22</a:t>
             </a:fld>
             <a:endParaRPr kumimoji="1" lang="ja-JP" altLang="en-US"/>
           </a:p>
@@ -2924,7 +2924,7 @@
           <a:p>
             <a:fld id="{84F5E02D-0C8B-421E-ABD8-EBBDC56DCCEC}" type="datetimeFigureOut">
               <a:rPr kumimoji="1" lang="ja-JP" altLang="en-US" smtClean="0"/>
-              <a:t>2026/8/19</a:t>
+              <a:t>2026/8/22</a:t>
             </a:fld>
             <a:endParaRPr kumimoji="1" lang="ja-JP" altLang="en-US"/>
           </a:p>
@@ -3197,7 +3197,7 @@
           <a:p>
             <a:fld id="{84F5E02D-0C8B-421E-ABD8-EBBDC56DCCEC}" type="datetimeFigureOut">
               <a:rPr kumimoji="1" lang="ja-JP" altLang="en-US" smtClean="0"/>
-              <a:t>2026/8/19</a:t>
+              <a:t>2026/8/22</a:t>
             </a:fld>
             <a:endParaRPr kumimoji="1" lang="ja-JP" altLang="en-US"/>
           </a:p>
@@ -8646,6 +8646,1161 @@
           </p:sp>
         </p:grpSp>
       </p:grpSp>
+      <p:grpSp>
+        <p:nvGrpSpPr>
+          <p:cNvPr id="42" name="グループ化 41">
+            <a:extLst>
+              <a:ext uri="{FF2B5EF4-FFF2-40B4-BE49-F238E27FC236}">
+                <a16:creationId xmlns:a16="http://schemas.microsoft.com/office/drawing/2014/main" id="{0A43BFA8-D93C-94B7-0979-41B3E67F999F}"/>
+              </a:ext>
+            </a:extLst>
+          </p:cNvPr>
+          <p:cNvGrpSpPr/>
+          <p:nvPr/>
+        </p:nvGrpSpPr>
+        <p:grpSpPr>
+          <a:xfrm>
+            <a:off x="4082470" y="2457259"/>
+            <a:ext cx="1016000" cy="709986"/>
+            <a:chOff x="4082470" y="2457259"/>
+            <a:chExt cx="1016000" cy="709986"/>
+          </a:xfrm>
+        </p:grpSpPr>
+        <p:sp>
+          <p:nvSpPr>
+            <p:cNvPr id="36" name="月 35">
+              <a:extLst>
+                <a:ext uri="{FF2B5EF4-FFF2-40B4-BE49-F238E27FC236}">
+                  <a16:creationId xmlns:a16="http://schemas.microsoft.com/office/drawing/2014/main" id="{04CB91C3-CA64-C76E-CC38-81659207352E}"/>
+                </a:ext>
+              </a:extLst>
+            </p:cNvPr>
+            <p:cNvSpPr/>
+            <p:nvPr/>
+          </p:nvSpPr>
+          <p:spPr>
+            <a:xfrm>
+              <a:off x="4426253" y="2457259"/>
+              <a:ext cx="304137" cy="486572"/>
+            </a:xfrm>
+            <a:prstGeom prst="moon">
+              <a:avLst>
+                <a:gd name="adj" fmla="val 43544"/>
+              </a:avLst>
+            </a:prstGeom>
+            <a:solidFill>
+              <a:schemeClr val="bg1"/>
+            </a:solidFill>
+            <a:ln w="19050">
+              <a:solidFill>
+                <a:schemeClr val="bg1"/>
+              </a:solidFill>
+            </a:ln>
+          </p:spPr>
+          <p:style>
+            <a:lnRef idx="2">
+              <a:schemeClr val="accent1">
+                <a:shade val="15000"/>
+              </a:schemeClr>
+            </a:lnRef>
+            <a:fillRef idx="1">
+              <a:schemeClr val="accent1"/>
+            </a:fillRef>
+            <a:effectRef idx="0">
+              <a:schemeClr val="accent1"/>
+            </a:effectRef>
+            <a:fontRef idx="minor">
+              <a:schemeClr val="lt1"/>
+            </a:fontRef>
+          </p:style>
+          <p:txBody>
+            <a:bodyPr rtlCol="0" anchor="ctr"/>
+            <a:lstStyle/>
+            <a:p>
+              <a:pPr algn="ctr"/>
+              <a:endParaRPr kumimoji="1" lang="ja-JP" altLang="en-US"/>
+            </a:p>
+          </p:txBody>
+        </p:sp>
+        <p:grpSp>
+          <p:nvGrpSpPr>
+            <p:cNvPr id="8" name="グループ化 7">
+              <a:extLst>
+                <a:ext uri="{FF2B5EF4-FFF2-40B4-BE49-F238E27FC236}">
+                  <a16:creationId xmlns:a16="http://schemas.microsoft.com/office/drawing/2014/main" id="{EE6FFC75-B366-B9D1-98CF-EB424486BB34}"/>
+                </a:ext>
+              </a:extLst>
+            </p:cNvPr>
+            <p:cNvGrpSpPr/>
+            <p:nvPr/>
+          </p:nvGrpSpPr>
+          <p:grpSpPr>
+            <a:xfrm>
+              <a:off x="4082470" y="2844192"/>
+              <a:ext cx="1016000" cy="323053"/>
+              <a:chOff x="4031673" y="828183"/>
+              <a:chExt cx="1016000" cy="323053"/>
+            </a:xfrm>
+          </p:grpSpPr>
+          <p:cxnSp>
+            <p:nvCxnSpPr>
+              <p:cNvPr id="10" name="直線コネクタ 9">
+                <a:extLst>
+                  <a:ext uri="{FF2B5EF4-FFF2-40B4-BE49-F238E27FC236}">
+                    <a16:creationId xmlns:a16="http://schemas.microsoft.com/office/drawing/2014/main" id="{B0E41797-F9AC-98D5-8FF3-B0636C7A2E60}"/>
+                  </a:ext>
+                </a:extLst>
+              </p:cNvPr>
+              <p:cNvCxnSpPr/>
+              <p:nvPr/>
+            </p:nvCxnSpPr>
+            <p:spPr>
+              <a:xfrm>
+                <a:off x="4031673" y="1009648"/>
+                <a:ext cx="1016000" cy="0"/>
+              </a:xfrm>
+              <a:prstGeom prst="line">
+                <a:avLst/>
+              </a:prstGeom>
+              <a:ln w="19050">
+                <a:solidFill>
+                  <a:schemeClr val="bg1"/>
+                </a:solidFill>
+              </a:ln>
+            </p:spPr>
+            <p:style>
+              <a:lnRef idx="1">
+                <a:schemeClr val="accent1"/>
+              </a:lnRef>
+              <a:fillRef idx="0">
+                <a:schemeClr val="accent1"/>
+              </a:fillRef>
+              <a:effectRef idx="0">
+                <a:schemeClr val="accent1"/>
+              </a:effectRef>
+              <a:fontRef idx="minor">
+                <a:schemeClr val="tx1"/>
+              </a:fontRef>
+            </p:style>
+          </p:cxnSp>
+          <p:cxnSp>
+            <p:nvCxnSpPr>
+              <p:cNvPr id="11" name="直線コネクタ 10">
+                <a:extLst>
+                  <a:ext uri="{FF2B5EF4-FFF2-40B4-BE49-F238E27FC236}">
+                    <a16:creationId xmlns:a16="http://schemas.microsoft.com/office/drawing/2014/main" id="{3ACE73CE-31A1-741C-2A11-2CB5499398CD}"/>
+                  </a:ext>
+                </a:extLst>
+              </p:cNvPr>
+              <p:cNvCxnSpPr>
+                <a:cxnSpLocks/>
+              </p:cNvCxnSpPr>
+              <p:nvPr/>
+            </p:nvCxnSpPr>
+            <p:spPr>
+              <a:xfrm>
+                <a:off x="4194824" y="1054098"/>
+                <a:ext cx="689697" cy="0"/>
+              </a:xfrm>
+              <a:prstGeom prst="line">
+                <a:avLst/>
+              </a:prstGeom>
+              <a:ln w="12700">
+                <a:solidFill>
+                  <a:schemeClr val="bg1"/>
+                </a:solidFill>
+              </a:ln>
+            </p:spPr>
+            <p:style>
+              <a:lnRef idx="1">
+                <a:schemeClr val="accent1"/>
+              </a:lnRef>
+              <a:fillRef idx="0">
+                <a:schemeClr val="accent1"/>
+              </a:fillRef>
+              <a:effectRef idx="0">
+                <a:schemeClr val="accent1"/>
+              </a:effectRef>
+              <a:fontRef idx="minor">
+                <a:schemeClr val="tx1"/>
+              </a:fontRef>
+            </p:style>
+          </p:cxnSp>
+          <p:cxnSp>
+            <p:nvCxnSpPr>
+              <p:cNvPr id="12" name="直線コネクタ 11">
+                <a:extLst>
+                  <a:ext uri="{FF2B5EF4-FFF2-40B4-BE49-F238E27FC236}">
+                    <a16:creationId xmlns:a16="http://schemas.microsoft.com/office/drawing/2014/main" id="{D582F1F3-8A70-D53E-0F0A-15EDD34A571A}"/>
+                  </a:ext>
+                </a:extLst>
+              </p:cNvPr>
+              <p:cNvCxnSpPr>
+                <a:cxnSpLocks/>
+              </p:cNvCxnSpPr>
+              <p:nvPr/>
+            </p:nvCxnSpPr>
+            <p:spPr>
+              <a:xfrm>
+                <a:off x="4326261" y="1104898"/>
+                <a:ext cx="426821" cy="0"/>
+              </a:xfrm>
+              <a:prstGeom prst="line">
+                <a:avLst/>
+              </a:prstGeom>
+              <a:ln w="6350">
+                <a:solidFill>
+                  <a:schemeClr val="bg1"/>
+                </a:solidFill>
+              </a:ln>
+            </p:spPr>
+            <p:style>
+              <a:lnRef idx="1">
+                <a:schemeClr val="accent1"/>
+              </a:lnRef>
+              <a:fillRef idx="0">
+                <a:schemeClr val="accent1"/>
+              </a:fillRef>
+              <a:effectRef idx="0">
+                <a:schemeClr val="accent1"/>
+              </a:effectRef>
+              <a:fontRef idx="minor">
+                <a:schemeClr val="tx1"/>
+              </a:fontRef>
+            </p:style>
+          </p:cxnSp>
+          <p:sp>
+            <p:nvSpPr>
+              <p:cNvPr id="14" name="矢印: ストライプ 13">
+                <a:extLst>
+                  <a:ext uri="{FF2B5EF4-FFF2-40B4-BE49-F238E27FC236}">
+                    <a16:creationId xmlns:a16="http://schemas.microsoft.com/office/drawing/2014/main" id="{C852A68D-4A5D-E495-3478-D53EA24D0538}"/>
+                  </a:ext>
+                </a:extLst>
+              </p:cNvPr>
+              <p:cNvSpPr/>
+              <p:nvPr/>
+            </p:nvSpPr>
+            <p:spPr>
+              <a:xfrm rot="16200000">
+                <a:off x="4375800" y="847444"/>
+                <a:ext cx="323053" cy="284532"/>
+              </a:xfrm>
+              <a:prstGeom prst="stripedRightArrow">
+                <a:avLst/>
+              </a:prstGeom>
+              <a:solidFill>
+                <a:schemeClr val="tx1"/>
+              </a:solidFill>
+              <a:ln w="38100">
+                <a:solidFill>
+                  <a:schemeClr val="bg1"/>
+                </a:solidFill>
+                <a:extLst>
+                  <a:ext uri="{C807C97D-BFC1-408E-A445-0C87EB9F89A2}">
+                    <ask:lineSketchStyleProps xmlns:ask="http://schemas.microsoft.com/office/drawing/2018/sketchyshapes" sd="4290183000">
+                      <a:custGeom>
+                        <a:avLst/>
+                        <a:gdLst>
+                          <a:gd name="csX0" fmla="*/ 0 w 323053"/>
+                          <a:gd name="csY0" fmla="*/ 58418 h 233673"/>
+                          <a:gd name="csX1" fmla="*/ 7302 w 323053"/>
+                          <a:gd name="csY1" fmla="*/ 58418 h 233673"/>
+                          <a:gd name="csX2" fmla="*/ 7302 w 323053"/>
+                          <a:gd name="csY2" fmla="*/ 175255 h 233673"/>
+                          <a:gd name="csX3" fmla="*/ 0 w 323053"/>
+                          <a:gd name="csY3" fmla="*/ 175255 h 233673"/>
+                          <a:gd name="csX4" fmla="*/ 0 w 323053"/>
+                          <a:gd name="csY4" fmla="*/ 58418 h 233673"/>
+                          <a:gd name="csX5" fmla="*/ 14605 w 323053"/>
+                          <a:gd name="csY5" fmla="*/ 58418 h 233673"/>
+                          <a:gd name="csX6" fmla="*/ 29209 w 323053"/>
+                          <a:gd name="csY6" fmla="*/ 58418 h 233673"/>
+                          <a:gd name="csX7" fmla="*/ 29209 w 323053"/>
+                          <a:gd name="csY7" fmla="*/ 175255 h 233673"/>
+                          <a:gd name="csX8" fmla="*/ 14605 w 323053"/>
+                          <a:gd name="csY8" fmla="*/ 175255 h 233673"/>
+                          <a:gd name="csX9" fmla="*/ 14605 w 323053"/>
+                          <a:gd name="csY9" fmla="*/ 58418 h 233673"/>
+                          <a:gd name="csX10" fmla="*/ 36511 w 323053"/>
+                          <a:gd name="csY10" fmla="*/ 58418 h 233673"/>
+                          <a:gd name="csX11" fmla="*/ 206217 w 323053"/>
+                          <a:gd name="csY11" fmla="*/ 58418 h 233673"/>
+                          <a:gd name="csX12" fmla="*/ 206217 w 323053"/>
+                          <a:gd name="csY12" fmla="*/ 0 h 233673"/>
+                          <a:gd name="csX13" fmla="*/ 323053 w 323053"/>
+                          <a:gd name="csY13" fmla="*/ 116837 h 233673"/>
+                          <a:gd name="csX14" fmla="*/ 206217 w 323053"/>
+                          <a:gd name="csY14" fmla="*/ 233673 h 233673"/>
+                          <a:gd name="csX15" fmla="*/ 206217 w 323053"/>
+                          <a:gd name="csY15" fmla="*/ 175255 h 233673"/>
+                          <a:gd name="csX16" fmla="*/ 36511 w 323053"/>
+                          <a:gd name="csY16" fmla="*/ 175255 h 233673"/>
+                          <a:gd name="csX17" fmla="*/ 36511 w 323053"/>
+                          <a:gd name="csY17" fmla="*/ 58418 h 233673"/>
+                        </a:gdLst>
+                        <a:ahLst/>
+                        <a:cxnLst>
+                          <a:cxn ang="0">
+                            <a:pos x="csX0" y="csY0"/>
+                          </a:cxn>
+                          <a:cxn ang="0">
+                            <a:pos x="csX1" y="csY1"/>
+                          </a:cxn>
+                          <a:cxn ang="0">
+                            <a:pos x="csX2" y="csY2"/>
+                          </a:cxn>
+                          <a:cxn ang="0">
+                            <a:pos x="csX3" y="csY3"/>
+                          </a:cxn>
+                          <a:cxn ang="0">
+                            <a:pos x="csX4" y="csY4"/>
+                          </a:cxn>
+                          <a:cxn ang="0">
+                            <a:pos x="csX5" y="csY5"/>
+                          </a:cxn>
+                          <a:cxn ang="0">
+                            <a:pos x="csX6" y="csY6"/>
+                          </a:cxn>
+                          <a:cxn ang="0">
+                            <a:pos x="csX7" y="csY7"/>
+                          </a:cxn>
+                          <a:cxn ang="0">
+                            <a:pos x="csX8" y="csY8"/>
+                          </a:cxn>
+                          <a:cxn ang="0">
+                            <a:pos x="csX9" y="csY9"/>
+                          </a:cxn>
+                          <a:cxn ang="0">
+                            <a:pos x="csX10" y="csY10"/>
+                          </a:cxn>
+                          <a:cxn ang="0">
+                            <a:pos x="csX11" y="csY11"/>
+                          </a:cxn>
+                          <a:cxn ang="0">
+                            <a:pos x="csX12" y="csY12"/>
+                          </a:cxn>
+                          <a:cxn ang="0">
+                            <a:pos x="csX13" y="csY13"/>
+                          </a:cxn>
+                          <a:cxn ang="0">
+                            <a:pos x="csX14" y="csY14"/>
+                          </a:cxn>
+                          <a:cxn ang="0">
+                            <a:pos x="csX15" y="csY15"/>
+                          </a:cxn>
+                          <a:cxn ang="0">
+                            <a:pos x="csX16" y="csY16"/>
+                          </a:cxn>
+                          <a:cxn ang="0">
+                            <a:pos x="csX17" y="csY17"/>
+                          </a:cxn>
+                        </a:cxnLst>
+                        <a:rect l="l" t="t" r="r" b="b"/>
+                        <a:pathLst>
+                          <a:path w="323053" h="233673" fill="none" extrusionOk="0">
+                            <a:moveTo>
+                              <a:pt x="0" y="58418"/>
+                            </a:moveTo>
+                            <a:cubicBezTo>
+                              <a:pt x="3492" y="57753"/>
+                              <a:pt x="4921" y="59029"/>
+                              <a:pt x="7302" y="58418"/>
+                            </a:cubicBezTo>
+                            <a:cubicBezTo>
+                              <a:pt x="18944" y="116488"/>
+                              <a:pt x="6214" y="124802"/>
+                              <a:pt x="7302" y="175255"/>
+                            </a:cubicBezTo>
+                            <a:cubicBezTo>
+                              <a:pt x="4849" y="175569"/>
+                              <a:pt x="1889" y="174719"/>
+                              <a:pt x="0" y="175255"/>
+                            </a:cubicBezTo>
+                            <a:cubicBezTo>
+                              <a:pt x="-7959" y="126912"/>
+                              <a:pt x="12134" y="82873"/>
+                              <a:pt x="0" y="58418"/>
+                            </a:cubicBezTo>
+                            <a:close/>
+                            <a:moveTo>
+                              <a:pt x="14605" y="58418"/>
+                            </a:moveTo>
+                            <a:cubicBezTo>
+                              <a:pt x="21420" y="57004"/>
+                              <a:pt x="23537" y="59461"/>
+                              <a:pt x="29209" y="58418"/>
+                            </a:cubicBezTo>
+                            <a:cubicBezTo>
+                              <a:pt x="39558" y="111131"/>
+                              <a:pt x="18591" y="142200"/>
+                              <a:pt x="29209" y="175255"/>
+                            </a:cubicBezTo>
+                            <a:cubicBezTo>
+                              <a:pt x="22473" y="175814"/>
+                              <a:pt x="21875" y="175228"/>
+                              <a:pt x="14605" y="175255"/>
+                            </a:cubicBezTo>
+                            <a:cubicBezTo>
+                              <a:pt x="10168" y="122117"/>
+                              <a:pt x="21702" y="92920"/>
+                              <a:pt x="14605" y="58418"/>
+                            </a:cubicBezTo>
+                            <a:close/>
+                            <a:moveTo>
+                              <a:pt x="36511" y="58418"/>
+                            </a:moveTo>
+                            <a:cubicBezTo>
+                              <a:pt x="105508" y="53038"/>
+                              <a:pt x="154230" y="66204"/>
+                              <a:pt x="206217" y="58418"/>
+                            </a:cubicBezTo>
+                            <a:cubicBezTo>
+                              <a:pt x="200888" y="33748"/>
+                              <a:pt x="210736" y="19838"/>
+                              <a:pt x="206217" y="0"/>
+                            </a:cubicBezTo>
+                            <a:cubicBezTo>
+                              <a:pt x="255471" y="29603"/>
+                              <a:pt x="260485" y="64698"/>
+                              <a:pt x="323053" y="116837"/>
+                            </a:cubicBezTo>
+                            <a:cubicBezTo>
+                              <a:pt x="285487" y="161992"/>
+                              <a:pt x="254529" y="170807"/>
+                              <a:pt x="206217" y="233673"/>
+                            </a:cubicBezTo>
+                            <a:cubicBezTo>
+                              <a:pt x="203281" y="217281"/>
+                              <a:pt x="207126" y="201599"/>
+                              <a:pt x="206217" y="175255"/>
+                            </a:cubicBezTo>
+                            <a:cubicBezTo>
+                              <a:pt x="154817" y="183263"/>
+                              <a:pt x="102302" y="173640"/>
+                              <a:pt x="36511" y="175255"/>
+                            </a:cubicBezTo>
+                            <a:cubicBezTo>
+                              <a:pt x="24908" y="132047"/>
+                              <a:pt x="49371" y="113203"/>
+                              <a:pt x="36511" y="58418"/>
+                            </a:cubicBezTo>
+                            <a:close/>
+                          </a:path>
+                          <a:path w="323053" h="233673" stroke="0" extrusionOk="0">
+                            <a:moveTo>
+                              <a:pt x="0" y="58418"/>
+                            </a:moveTo>
+                            <a:cubicBezTo>
+                              <a:pt x="1641" y="58167"/>
+                              <a:pt x="5321" y="58661"/>
+                              <a:pt x="7302" y="58418"/>
+                            </a:cubicBezTo>
+                            <a:cubicBezTo>
+                              <a:pt x="7686" y="112915"/>
+                              <a:pt x="5307" y="126822"/>
+                              <a:pt x="7302" y="175255"/>
+                            </a:cubicBezTo>
+                            <a:cubicBezTo>
+                              <a:pt x="4281" y="175997"/>
+                              <a:pt x="2436" y="174835"/>
+                              <a:pt x="0" y="175255"/>
+                            </a:cubicBezTo>
+                            <a:cubicBezTo>
+                              <a:pt x="-11497" y="124074"/>
+                              <a:pt x="7682" y="102072"/>
+                              <a:pt x="0" y="58418"/>
+                            </a:cubicBezTo>
+                            <a:close/>
+                            <a:moveTo>
+                              <a:pt x="14605" y="58418"/>
+                            </a:moveTo>
+                            <a:cubicBezTo>
+                              <a:pt x="20137" y="57814"/>
+                              <a:pt x="25295" y="60112"/>
+                              <a:pt x="29209" y="58418"/>
+                            </a:cubicBezTo>
+                            <a:cubicBezTo>
+                              <a:pt x="32228" y="102847"/>
+                              <a:pt x="21042" y="138546"/>
+                              <a:pt x="29209" y="175255"/>
+                            </a:cubicBezTo>
+                            <a:cubicBezTo>
+                              <a:pt x="24301" y="175520"/>
+                              <a:pt x="19209" y="174182"/>
+                              <a:pt x="14605" y="175255"/>
+                            </a:cubicBezTo>
+                            <a:cubicBezTo>
+                              <a:pt x="7015" y="148437"/>
+                              <a:pt x="19567" y="98117"/>
+                              <a:pt x="14605" y="58418"/>
+                            </a:cubicBezTo>
+                            <a:close/>
+                            <a:moveTo>
+                              <a:pt x="36511" y="58418"/>
+                            </a:moveTo>
+                            <a:cubicBezTo>
+                              <a:pt x="90395" y="51229"/>
+                              <a:pt x="154279" y="74237"/>
+                              <a:pt x="206217" y="58418"/>
+                            </a:cubicBezTo>
+                            <a:cubicBezTo>
+                              <a:pt x="199432" y="45887"/>
+                              <a:pt x="207807" y="17911"/>
+                              <a:pt x="206217" y="0"/>
+                            </a:cubicBezTo>
+                            <a:cubicBezTo>
+                              <a:pt x="258051" y="37611"/>
+                              <a:pt x="260777" y="75895"/>
+                              <a:pt x="323053" y="116837"/>
+                            </a:cubicBezTo>
+                            <a:cubicBezTo>
+                              <a:pt x="306293" y="158459"/>
+                              <a:pt x="251100" y="187026"/>
+                              <a:pt x="206217" y="233673"/>
+                            </a:cubicBezTo>
+                            <a:cubicBezTo>
+                              <a:pt x="204480" y="215826"/>
+                              <a:pt x="210939" y="203196"/>
+                              <a:pt x="206217" y="175255"/>
+                            </a:cubicBezTo>
+                            <a:cubicBezTo>
+                              <a:pt x="159032" y="179363"/>
+                              <a:pt x="94242" y="159627"/>
+                              <a:pt x="36511" y="175255"/>
+                            </a:cubicBezTo>
+                            <a:cubicBezTo>
+                              <a:pt x="32067" y="145343"/>
+                              <a:pt x="38457" y="82285"/>
+                              <a:pt x="36511" y="58418"/>
+                            </a:cubicBezTo>
+                            <a:close/>
+                          </a:path>
+                        </a:pathLst>
+                      </a:custGeom>
+                      <ask:type>
+                        <ask:lineSketchNone/>
+                      </ask:type>
+                    </ask:lineSketchStyleProps>
+                  </a:ext>
+                </a:extLst>
+              </a:ln>
+            </p:spPr>
+            <p:style>
+              <a:lnRef idx="2">
+                <a:schemeClr val="accent1">
+                  <a:shade val="15000"/>
+                </a:schemeClr>
+              </a:lnRef>
+              <a:fillRef idx="1">
+                <a:schemeClr val="accent1"/>
+              </a:fillRef>
+              <a:effectRef idx="0">
+                <a:schemeClr val="accent1"/>
+              </a:effectRef>
+              <a:fontRef idx="minor">
+                <a:schemeClr val="lt1"/>
+              </a:fontRef>
+            </p:style>
+            <p:txBody>
+              <a:bodyPr rtlCol="0" anchor="ctr"/>
+              <a:lstStyle/>
+              <a:p>
+                <a:pPr algn="ctr"/>
+                <a:endParaRPr kumimoji="1" lang="ja-JP" altLang="en-US"/>
+              </a:p>
+            </p:txBody>
+          </p:sp>
+        </p:grpSp>
+      </p:grpSp>
+      <p:grpSp>
+        <p:nvGrpSpPr>
+          <p:cNvPr id="43" name="グループ化 42">
+            <a:extLst>
+              <a:ext uri="{FF2B5EF4-FFF2-40B4-BE49-F238E27FC236}">
+                <a16:creationId xmlns:a16="http://schemas.microsoft.com/office/drawing/2014/main" id="{F0298E22-0261-98B0-50C3-E013E4209900}"/>
+              </a:ext>
+            </a:extLst>
+          </p:cNvPr>
+          <p:cNvGrpSpPr/>
+          <p:nvPr/>
+        </p:nvGrpSpPr>
+        <p:grpSpPr>
+          <a:xfrm>
+            <a:off x="5994399" y="2468491"/>
+            <a:ext cx="1016000" cy="729851"/>
+            <a:chOff x="5994399" y="2468491"/>
+            <a:chExt cx="1016000" cy="729851"/>
+          </a:xfrm>
+        </p:grpSpPr>
+        <p:grpSp>
+          <p:nvGrpSpPr>
+            <p:cNvPr id="15" name="グループ化 14">
+              <a:extLst>
+                <a:ext uri="{FF2B5EF4-FFF2-40B4-BE49-F238E27FC236}">
+                  <a16:creationId xmlns:a16="http://schemas.microsoft.com/office/drawing/2014/main" id="{51CDC766-8E44-3B2E-1189-08EA78E47921}"/>
+                </a:ext>
+              </a:extLst>
+            </p:cNvPr>
+            <p:cNvGrpSpPr/>
+            <p:nvPr/>
+          </p:nvGrpSpPr>
+          <p:grpSpPr>
+            <a:xfrm>
+              <a:off x="5994399" y="2875289"/>
+              <a:ext cx="1016000" cy="323053"/>
+              <a:chOff x="5943602" y="859280"/>
+              <a:chExt cx="1016000" cy="323053"/>
+            </a:xfrm>
+          </p:grpSpPr>
+          <p:grpSp>
+            <p:nvGrpSpPr>
+              <p:cNvPr id="25" name="グループ化 24">
+                <a:extLst>
+                  <a:ext uri="{FF2B5EF4-FFF2-40B4-BE49-F238E27FC236}">
+                    <a16:creationId xmlns:a16="http://schemas.microsoft.com/office/drawing/2014/main" id="{82CAA921-DCB6-E347-1C43-A673E6FD5589}"/>
+                  </a:ext>
+                </a:extLst>
+              </p:cNvPr>
+              <p:cNvGrpSpPr/>
+              <p:nvPr/>
+            </p:nvGrpSpPr>
+            <p:grpSpPr>
+              <a:xfrm>
+                <a:off x="5943602" y="1003441"/>
+                <a:ext cx="1016000" cy="95250"/>
+                <a:chOff x="5943602" y="1003441"/>
+                <a:chExt cx="1016000" cy="95250"/>
+              </a:xfrm>
+            </p:grpSpPr>
+            <p:cxnSp>
+              <p:nvCxnSpPr>
+                <p:cNvPr id="30" name="直線コネクタ 29">
+                  <a:extLst>
+                    <a:ext uri="{FF2B5EF4-FFF2-40B4-BE49-F238E27FC236}">
+                      <a16:creationId xmlns:a16="http://schemas.microsoft.com/office/drawing/2014/main" id="{ECD828EA-7ECF-20DF-EF27-575700784E88}"/>
+                    </a:ext>
+                  </a:extLst>
+                </p:cNvPr>
+                <p:cNvCxnSpPr/>
+                <p:nvPr/>
+              </p:nvCxnSpPr>
+              <p:spPr>
+                <a:xfrm>
+                  <a:off x="5943602" y="1003441"/>
+                  <a:ext cx="1016000" cy="0"/>
+                </a:xfrm>
+                <a:prstGeom prst="line">
+                  <a:avLst/>
+                </a:prstGeom>
+                <a:ln w="19050">
+                  <a:solidFill>
+                    <a:schemeClr val="bg1"/>
+                  </a:solidFill>
+                </a:ln>
+              </p:spPr>
+              <p:style>
+                <a:lnRef idx="1">
+                  <a:schemeClr val="accent1"/>
+                </a:lnRef>
+                <a:fillRef idx="0">
+                  <a:schemeClr val="accent1"/>
+                </a:fillRef>
+                <a:effectRef idx="0">
+                  <a:schemeClr val="accent1"/>
+                </a:effectRef>
+                <a:fontRef idx="minor">
+                  <a:schemeClr val="tx1"/>
+                </a:fontRef>
+              </p:style>
+            </p:cxnSp>
+            <p:cxnSp>
+              <p:nvCxnSpPr>
+                <p:cNvPr id="33" name="直線コネクタ 32">
+                  <a:extLst>
+                    <a:ext uri="{FF2B5EF4-FFF2-40B4-BE49-F238E27FC236}">
+                      <a16:creationId xmlns:a16="http://schemas.microsoft.com/office/drawing/2014/main" id="{501060EA-764D-845A-2C6F-F22853AB5FBE}"/>
+                    </a:ext>
+                  </a:extLst>
+                </p:cNvPr>
+                <p:cNvCxnSpPr>
+                  <a:cxnSpLocks/>
+                </p:cNvCxnSpPr>
+                <p:nvPr/>
+              </p:nvCxnSpPr>
+              <p:spPr>
+                <a:xfrm>
+                  <a:off x="6106753" y="1047891"/>
+                  <a:ext cx="689697" cy="0"/>
+                </a:xfrm>
+                <a:prstGeom prst="line">
+                  <a:avLst/>
+                </a:prstGeom>
+                <a:ln w="12700">
+                  <a:solidFill>
+                    <a:schemeClr val="bg1"/>
+                  </a:solidFill>
+                </a:ln>
+              </p:spPr>
+              <p:style>
+                <a:lnRef idx="1">
+                  <a:schemeClr val="accent1"/>
+                </a:lnRef>
+                <a:fillRef idx="0">
+                  <a:schemeClr val="accent1"/>
+                </a:fillRef>
+                <a:effectRef idx="0">
+                  <a:schemeClr val="accent1"/>
+                </a:effectRef>
+                <a:fontRef idx="minor">
+                  <a:schemeClr val="tx1"/>
+                </a:fontRef>
+              </p:style>
+            </p:cxnSp>
+            <p:cxnSp>
+              <p:nvCxnSpPr>
+                <p:cNvPr id="34" name="直線コネクタ 33">
+                  <a:extLst>
+                    <a:ext uri="{FF2B5EF4-FFF2-40B4-BE49-F238E27FC236}">
+                      <a16:creationId xmlns:a16="http://schemas.microsoft.com/office/drawing/2014/main" id="{8EB32B0B-B12D-1B13-D78C-CC424E68353D}"/>
+                    </a:ext>
+                  </a:extLst>
+                </p:cNvPr>
+                <p:cNvCxnSpPr>
+                  <a:cxnSpLocks/>
+                </p:cNvCxnSpPr>
+                <p:nvPr/>
+              </p:nvCxnSpPr>
+              <p:spPr>
+                <a:xfrm>
+                  <a:off x="6238190" y="1098691"/>
+                  <a:ext cx="426821" cy="0"/>
+                </a:xfrm>
+                <a:prstGeom prst="line">
+                  <a:avLst/>
+                </a:prstGeom>
+                <a:ln w="6350">
+                  <a:solidFill>
+                    <a:schemeClr val="bg1"/>
+                  </a:solidFill>
+                </a:ln>
+              </p:spPr>
+              <p:style>
+                <a:lnRef idx="1">
+                  <a:schemeClr val="accent1"/>
+                </a:lnRef>
+                <a:fillRef idx="0">
+                  <a:schemeClr val="accent1"/>
+                </a:fillRef>
+                <a:effectRef idx="0">
+                  <a:schemeClr val="accent1"/>
+                </a:effectRef>
+                <a:fontRef idx="minor">
+                  <a:schemeClr val="tx1"/>
+                </a:fontRef>
+              </p:style>
+            </p:cxnSp>
+          </p:grpSp>
+          <p:sp>
+            <p:nvSpPr>
+              <p:cNvPr id="22" name="矢印: ストライプ 21">
+                <a:extLst>
+                  <a:ext uri="{FF2B5EF4-FFF2-40B4-BE49-F238E27FC236}">
+                    <a16:creationId xmlns:a16="http://schemas.microsoft.com/office/drawing/2014/main" id="{CD0D520D-4DFF-D8EA-1141-F7B1211A92D1}"/>
+                  </a:ext>
+                </a:extLst>
+              </p:cNvPr>
+              <p:cNvSpPr/>
+              <p:nvPr/>
+            </p:nvSpPr>
+            <p:spPr>
+              <a:xfrm rot="5400000">
+                <a:off x="6292415" y="878541"/>
+                <a:ext cx="323053" cy="284532"/>
+              </a:xfrm>
+              <a:prstGeom prst="stripedRightArrow">
+                <a:avLst/>
+              </a:prstGeom>
+              <a:solidFill>
+                <a:schemeClr val="tx1"/>
+              </a:solidFill>
+              <a:ln w="38100">
+                <a:solidFill>
+                  <a:schemeClr val="bg1"/>
+                </a:solidFill>
+                <a:extLst>
+                  <a:ext uri="{C807C97D-BFC1-408E-A445-0C87EB9F89A2}">
+                    <ask:lineSketchStyleProps xmlns:ask="http://schemas.microsoft.com/office/drawing/2018/sketchyshapes" sd="4290183000">
+                      <a:custGeom>
+                        <a:avLst/>
+                        <a:gdLst>
+                          <a:gd name="csX0" fmla="*/ 0 w 323053"/>
+                          <a:gd name="csY0" fmla="*/ 58418 h 233673"/>
+                          <a:gd name="csX1" fmla="*/ 7302 w 323053"/>
+                          <a:gd name="csY1" fmla="*/ 58418 h 233673"/>
+                          <a:gd name="csX2" fmla="*/ 7302 w 323053"/>
+                          <a:gd name="csY2" fmla="*/ 175255 h 233673"/>
+                          <a:gd name="csX3" fmla="*/ 0 w 323053"/>
+                          <a:gd name="csY3" fmla="*/ 175255 h 233673"/>
+                          <a:gd name="csX4" fmla="*/ 0 w 323053"/>
+                          <a:gd name="csY4" fmla="*/ 58418 h 233673"/>
+                          <a:gd name="csX5" fmla="*/ 14605 w 323053"/>
+                          <a:gd name="csY5" fmla="*/ 58418 h 233673"/>
+                          <a:gd name="csX6" fmla="*/ 29209 w 323053"/>
+                          <a:gd name="csY6" fmla="*/ 58418 h 233673"/>
+                          <a:gd name="csX7" fmla="*/ 29209 w 323053"/>
+                          <a:gd name="csY7" fmla="*/ 175255 h 233673"/>
+                          <a:gd name="csX8" fmla="*/ 14605 w 323053"/>
+                          <a:gd name="csY8" fmla="*/ 175255 h 233673"/>
+                          <a:gd name="csX9" fmla="*/ 14605 w 323053"/>
+                          <a:gd name="csY9" fmla="*/ 58418 h 233673"/>
+                          <a:gd name="csX10" fmla="*/ 36511 w 323053"/>
+                          <a:gd name="csY10" fmla="*/ 58418 h 233673"/>
+                          <a:gd name="csX11" fmla="*/ 206217 w 323053"/>
+                          <a:gd name="csY11" fmla="*/ 58418 h 233673"/>
+                          <a:gd name="csX12" fmla="*/ 206217 w 323053"/>
+                          <a:gd name="csY12" fmla="*/ 0 h 233673"/>
+                          <a:gd name="csX13" fmla="*/ 323053 w 323053"/>
+                          <a:gd name="csY13" fmla="*/ 116837 h 233673"/>
+                          <a:gd name="csX14" fmla="*/ 206217 w 323053"/>
+                          <a:gd name="csY14" fmla="*/ 233673 h 233673"/>
+                          <a:gd name="csX15" fmla="*/ 206217 w 323053"/>
+                          <a:gd name="csY15" fmla="*/ 175255 h 233673"/>
+                          <a:gd name="csX16" fmla="*/ 36511 w 323053"/>
+                          <a:gd name="csY16" fmla="*/ 175255 h 233673"/>
+                          <a:gd name="csX17" fmla="*/ 36511 w 323053"/>
+                          <a:gd name="csY17" fmla="*/ 58418 h 233673"/>
+                        </a:gdLst>
+                        <a:ahLst/>
+                        <a:cxnLst>
+                          <a:cxn ang="0">
+                            <a:pos x="csX0" y="csY0"/>
+                          </a:cxn>
+                          <a:cxn ang="0">
+                            <a:pos x="csX1" y="csY1"/>
+                          </a:cxn>
+                          <a:cxn ang="0">
+                            <a:pos x="csX2" y="csY2"/>
+                          </a:cxn>
+                          <a:cxn ang="0">
+                            <a:pos x="csX3" y="csY3"/>
+                          </a:cxn>
+                          <a:cxn ang="0">
+                            <a:pos x="csX4" y="csY4"/>
+                          </a:cxn>
+                          <a:cxn ang="0">
+                            <a:pos x="csX5" y="csY5"/>
+                          </a:cxn>
+                          <a:cxn ang="0">
+                            <a:pos x="csX6" y="csY6"/>
+                          </a:cxn>
+                          <a:cxn ang="0">
+                            <a:pos x="csX7" y="csY7"/>
+                          </a:cxn>
+                          <a:cxn ang="0">
+                            <a:pos x="csX8" y="csY8"/>
+                          </a:cxn>
+                          <a:cxn ang="0">
+                            <a:pos x="csX9" y="csY9"/>
+                          </a:cxn>
+                          <a:cxn ang="0">
+                            <a:pos x="csX10" y="csY10"/>
+                          </a:cxn>
+                          <a:cxn ang="0">
+                            <a:pos x="csX11" y="csY11"/>
+                          </a:cxn>
+                          <a:cxn ang="0">
+                            <a:pos x="csX12" y="csY12"/>
+                          </a:cxn>
+                          <a:cxn ang="0">
+                            <a:pos x="csX13" y="csY13"/>
+                          </a:cxn>
+                          <a:cxn ang="0">
+                            <a:pos x="csX14" y="csY14"/>
+                          </a:cxn>
+                          <a:cxn ang="0">
+                            <a:pos x="csX15" y="csY15"/>
+                          </a:cxn>
+                          <a:cxn ang="0">
+                            <a:pos x="csX16" y="csY16"/>
+                          </a:cxn>
+                          <a:cxn ang="0">
+                            <a:pos x="csX17" y="csY17"/>
+                          </a:cxn>
+                        </a:cxnLst>
+                        <a:rect l="l" t="t" r="r" b="b"/>
+                        <a:pathLst>
+                          <a:path w="323053" h="233673" fill="none" extrusionOk="0">
+                            <a:moveTo>
+                              <a:pt x="0" y="58418"/>
+                            </a:moveTo>
+                            <a:cubicBezTo>
+                              <a:pt x="3492" y="57753"/>
+                              <a:pt x="4921" y="59029"/>
+                              <a:pt x="7302" y="58418"/>
+                            </a:cubicBezTo>
+                            <a:cubicBezTo>
+                              <a:pt x="18944" y="116488"/>
+                              <a:pt x="6214" y="124802"/>
+                              <a:pt x="7302" y="175255"/>
+                            </a:cubicBezTo>
+                            <a:cubicBezTo>
+                              <a:pt x="4849" y="175569"/>
+                              <a:pt x="1889" y="174719"/>
+                              <a:pt x="0" y="175255"/>
+                            </a:cubicBezTo>
+                            <a:cubicBezTo>
+                              <a:pt x="-7959" y="126912"/>
+                              <a:pt x="12134" y="82873"/>
+                              <a:pt x="0" y="58418"/>
+                            </a:cubicBezTo>
+                            <a:close/>
+                            <a:moveTo>
+                              <a:pt x="14605" y="58418"/>
+                            </a:moveTo>
+                            <a:cubicBezTo>
+                              <a:pt x="21420" y="57004"/>
+                              <a:pt x="23537" y="59461"/>
+                              <a:pt x="29209" y="58418"/>
+                            </a:cubicBezTo>
+                            <a:cubicBezTo>
+                              <a:pt x="39558" y="111131"/>
+                              <a:pt x="18591" y="142200"/>
+                              <a:pt x="29209" y="175255"/>
+                            </a:cubicBezTo>
+                            <a:cubicBezTo>
+                              <a:pt x="22473" y="175814"/>
+                              <a:pt x="21875" y="175228"/>
+                              <a:pt x="14605" y="175255"/>
+                            </a:cubicBezTo>
+                            <a:cubicBezTo>
+                              <a:pt x="10168" y="122117"/>
+                              <a:pt x="21702" y="92920"/>
+                              <a:pt x="14605" y="58418"/>
+                            </a:cubicBezTo>
+                            <a:close/>
+                            <a:moveTo>
+                              <a:pt x="36511" y="58418"/>
+                            </a:moveTo>
+                            <a:cubicBezTo>
+                              <a:pt x="105508" y="53038"/>
+                              <a:pt x="154230" y="66204"/>
+                              <a:pt x="206217" y="58418"/>
+                            </a:cubicBezTo>
+                            <a:cubicBezTo>
+                              <a:pt x="200888" y="33748"/>
+                              <a:pt x="210736" y="19838"/>
+                              <a:pt x="206217" y="0"/>
+                            </a:cubicBezTo>
+                            <a:cubicBezTo>
+                              <a:pt x="255471" y="29603"/>
+                              <a:pt x="260485" y="64698"/>
+                              <a:pt x="323053" y="116837"/>
+                            </a:cubicBezTo>
+                            <a:cubicBezTo>
+                              <a:pt x="285487" y="161992"/>
+                              <a:pt x="254529" y="170807"/>
+                              <a:pt x="206217" y="233673"/>
+                            </a:cubicBezTo>
+                            <a:cubicBezTo>
+                              <a:pt x="203281" y="217281"/>
+                              <a:pt x="207126" y="201599"/>
+                              <a:pt x="206217" y="175255"/>
+                            </a:cubicBezTo>
+                            <a:cubicBezTo>
+                              <a:pt x="154817" y="183263"/>
+                              <a:pt x="102302" y="173640"/>
+                              <a:pt x="36511" y="175255"/>
+                            </a:cubicBezTo>
+                            <a:cubicBezTo>
+                              <a:pt x="24908" y="132047"/>
+                              <a:pt x="49371" y="113203"/>
+                              <a:pt x="36511" y="58418"/>
+                            </a:cubicBezTo>
+                            <a:close/>
+                          </a:path>
+                          <a:path w="323053" h="233673" stroke="0" extrusionOk="0">
+                            <a:moveTo>
+                              <a:pt x="0" y="58418"/>
+                            </a:moveTo>
+                            <a:cubicBezTo>
+                              <a:pt x="1641" y="58167"/>
+                              <a:pt x="5321" y="58661"/>
+                              <a:pt x="7302" y="58418"/>
+                            </a:cubicBezTo>
+                            <a:cubicBezTo>
+                              <a:pt x="7686" y="112915"/>
+                              <a:pt x="5307" y="126822"/>
+                              <a:pt x="7302" y="175255"/>
+                            </a:cubicBezTo>
+                            <a:cubicBezTo>
+                              <a:pt x="4281" y="175997"/>
+                              <a:pt x="2436" y="174835"/>
+                              <a:pt x="0" y="175255"/>
+                            </a:cubicBezTo>
+                            <a:cubicBezTo>
+                              <a:pt x="-11497" y="124074"/>
+                              <a:pt x="7682" y="102072"/>
+                              <a:pt x="0" y="58418"/>
+                            </a:cubicBezTo>
+                            <a:close/>
+                            <a:moveTo>
+                              <a:pt x="14605" y="58418"/>
+                            </a:moveTo>
+                            <a:cubicBezTo>
+                              <a:pt x="20137" y="57814"/>
+                              <a:pt x="25295" y="60112"/>
+                              <a:pt x="29209" y="58418"/>
+                            </a:cubicBezTo>
+                            <a:cubicBezTo>
+                              <a:pt x="32228" y="102847"/>
+                              <a:pt x="21042" y="138546"/>
+                              <a:pt x="29209" y="175255"/>
+                            </a:cubicBezTo>
+                            <a:cubicBezTo>
+                              <a:pt x="24301" y="175520"/>
+                              <a:pt x="19209" y="174182"/>
+                              <a:pt x="14605" y="175255"/>
+                            </a:cubicBezTo>
+                            <a:cubicBezTo>
+                              <a:pt x="7015" y="148437"/>
+                              <a:pt x="19567" y="98117"/>
+                              <a:pt x="14605" y="58418"/>
+                            </a:cubicBezTo>
+                            <a:close/>
+                            <a:moveTo>
+                              <a:pt x="36511" y="58418"/>
+                            </a:moveTo>
+                            <a:cubicBezTo>
+                              <a:pt x="90395" y="51229"/>
+                              <a:pt x="154279" y="74237"/>
+                              <a:pt x="206217" y="58418"/>
+                            </a:cubicBezTo>
+                            <a:cubicBezTo>
+                              <a:pt x="199432" y="45887"/>
+                              <a:pt x="207807" y="17911"/>
+                              <a:pt x="206217" y="0"/>
+                            </a:cubicBezTo>
+                            <a:cubicBezTo>
+                              <a:pt x="258051" y="37611"/>
+                              <a:pt x="260777" y="75895"/>
+                              <a:pt x="323053" y="116837"/>
+                            </a:cubicBezTo>
+                            <a:cubicBezTo>
+                              <a:pt x="306293" y="158459"/>
+                              <a:pt x="251100" y="187026"/>
+                              <a:pt x="206217" y="233673"/>
+                            </a:cubicBezTo>
+                            <a:cubicBezTo>
+                              <a:pt x="204480" y="215826"/>
+                              <a:pt x="210939" y="203196"/>
+                              <a:pt x="206217" y="175255"/>
+                            </a:cubicBezTo>
+                            <a:cubicBezTo>
+                              <a:pt x="159032" y="179363"/>
+                              <a:pt x="94242" y="159627"/>
+                              <a:pt x="36511" y="175255"/>
+                            </a:cubicBezTo>
+                            <a:cubicBezTo>
+                              <a:pt x="32067" y="145343"/>
+                              <a:pt x="38457" y="82285"/>
+                              <a:pt x="36511" y="58418"/>
+                            </a:cubicBezTo>
+                            <a:close/>
+                          </a:path>
+                        </a:pathLst>
+                      </a:custGeom>
+                      <ask:type>
+                        <ask:lineSketchNone/>
+                      </ask:type>
+                    </ask:lineSketchStyleProps>
+                  </a:ext>
+                </a:extLst>
+              </a:ln>
+            </p:spPr>
+            <p:style>
+              <a:lnRef idx="2">
+                <a:schemeClr val="accent1">
+                  <a:shade val="15000"/>
+                </a:schemeClr>
+              </a:lnRef>
+              <a:fillRef idx="1">
+                <a:schemeClr val="accent1"/>
+              </a:fillRef>
+              <a:effectRef idx="0">
+                <a:schemeClr val="accent1"/>
+              </a:effectRef>
+              <a:fontRef idx="minor">
+                <a:schemeClr val="lt1"/>
+              </a:fontRef>
+            </p:style>
+            <p:txBody>
+              <a:bodyPr rtlCol="0" anchor="ctr"/>
+              <a:lstStyle/>
+              <a:p>
+                <a:pPr algn="ctr"/>
+                <a:endParaRPr kumimoji="1" lang="ja-JP" altLang="en-US"/>
+              </a:p>
+            </p:txBody>
+          </p:sp>
+        </p:grpSp>
+        <p:sp>
+          <p:nvSpPr>
+            <p:cNvPr id="41" name="月 40">
+              <a:extLst>
+                <a:ext uri="{FF2B5EF4-FFF2-40B4-BE49-F238E27FC236}">
+                  <a16:creationId xmlns:a16="http://schemas.microsoft.com/office/drawing/2014/main" id="{785D03DE-42EA-8127-7F19-BD6D37507CA7}"/>
+                </a:ext>
+              </a:extLst>
+            </p:cNvPr>
+            <p:cNvSpPr/>
+            <p:nvPr/>
+          </p:nvSpPr>
+          <p:spPr>
+            <a:xfrm>
+              <a:off x="6288983" y="2468491"/>
+              <a:ext cx="304137" cy="486572"/>
+            </a:xfrm>
+            <a:prstGeom prst="moon">
+              <a:avLst>
+                <a:gd name="adj" fmla="val 43544"/>
+              </a:avLst>
+            </a:prstGeom>
+            <a:solidFill>
+              <a:schemeClr val="bg1"/>
+            </a:solidFill>
+            <a:ln w="19050">
+              <a:solidFill>
+                <a:schemeClr val="bg1"/>
+              </a:solidFill>
+            </a:ln>
+          </p:spPr>
+          <p:style>
+            <a:lnRef idx="2">
+              <a:schemeClr val="accent1">
+                <a:shade val="15000"/>
+              </a:schemeClr>
+            </a:lnRef>
+            <a:fillRef idx="1">
+              <a:schemeClr val="accent1"/>
+            </a:fillRef>
+            <a:effectRef idx="0">
+              <a:schemeClr val="accent1"/>
+            </a:effectRef>
+            <a:fontRef idx="minor">
+              <a:schemeClr val="lt1"/>
+            </a:fontRef>
+          </p:style>
+          <p:txBody>
+            <a:bodyPr rtlCol="0" anchor="ctr"/>
+            <a:lstStyle/>
+            <a:p>
+              <a:pPr algn="ctr"/>
+              <a:endParaRPr kumimoji="1" lang="ja-JP" altLang="en-US"/>
+            </a:p>
+          </p:txBody>
+        </p:sp>
+      </p:grpSp>
     </p:spTree>
     <p:extLst>
       <p:ext uri="{BB962C8B-B14F-4D97-AF65-F5344CB8AC3E}">
